--- a/practice/bai-2-hanh-chinh.pptx
+++ b/practice/bai-2-hanh-chinh.pptx
@@ -8313,108 +8313,14 @@
     </a:clrScheme>
     <a:fontScheme name="Office">
       <a:majorFont>
-        <a:latin typeface="Calibri Light" panose="020F0302020204030204"/>
-        <a:ea typeface=""/>
-        <a:cs typeface=""/>
-        <a:font script="Jpan" typeface="游ゴシック Light"/>
-        <a:font script="Hang" typeface="맑은 고딕"/>
-        <a:font script="Hans" typeface="等线 Light"/>
-        <a:font script="Hant" typeface="新細明體"/>
-        <a:font script="Arab" typeface="Times New Roman"/>
-        <a:font script="Hebr" typeface="Times New Roman"/>
-        <a:font script="Thai" typeface="Angsana New"/>
-        <a:font script="Ethi" typeface="Nyala"/>
-        <a:font script="Beng" typeface="Vrinda"/>
-        <a:font script="Gujr" typeface="Shruti"/>
-        <a:font script="Khmr" typeface="MoolBoran"/>
-        <a:font script="Knda" typeface="Tunga"/>
-        <a:font script="Guru" typeface="Raavi"/>
-        <a:font script="Cans" typeface="Euphemia"/>
-        <a:font script="Cher" typeface="Plantagenet Cherokee"/>
-        <a:font script="Yiii" typeface="Microsoft Yi Baiti"/>
-        <a:font script="Tibt" typeface="Microsoft Himalaya"/>
-        <a:font script="Thaa" typeface="MV Boli"/>
-        <a:font script="Deva" typeface="Mangal"/>
-        <a:font script="Telu" typeface="Gautami"/>
-        <a:font script="Taml" typeface="Latha"/>
-        <a:font script="Syrc" typeface="Estrangelo Edessa"/>
-        <a:font script="Orya" typeface="Kalinga"/>
-        <a:font script="Mlym" typeface="Kartika"/>
-        <a:font script="Laoo" typeface="DokChampa"/>
-        <a:font script="Sinh" typeface="Iskoola Pota"/>
-        <a:font script="Mong" typeface="Mongolian Baiti"/>
-        <a:font script="Viet" typeface="Times New Roman"/>
-        <a:font script="Uigh" typeface="Microsoft Uighur"/>
-        <a:font script="Geor" typeface="Sylfaen"/>
-        <a:font script="Armn" typeface="Arial"/>
-        <a:font script="Bugi" typeface="Leelawadee UI"/>
-        <a:font script="Bopo" typeface="Microsoft JhengHei"/>
-        <a:font script="Java" typeface="Javanese Text"/>
-        <a:font script="Lisu" typeface="Segoe UI"/>
-        <a:font script="Mymr" typeface="Myanmar Text"/>
-        <a:font script="Nkoo" typeface="Ebrima"/>
-        <a:font script="Olck" typeface="Nirmala UI"/>
-        <a:font script="Osma" typeface="Ebrima"/>
-        <a:font script="Phag" typeface="Phagspa"/>
-        <a:font script="Syrn" typeface="Estrangelo Edessa"/>
-        <a:font script="Syrj" typeface="Estrangelo Edessa"/>
-        <a:font script="Syre" typeface="Estrangelo Edessa"/>
-        <a:font script="Sora" typeface="Nirmala UI"/>
-        <a:font script="Tale" typeface="Microsoft Tai Le"/>
-        <a:font script="Talu" typeface="Microsoft New Tai Lue"/>
-        <a:font script="Tfng" typeface="Ebrima"/>
+        <a:latin typeface="Cambria" panose="020F0302020204030204"/>
+        <a:ea typeface="Cambria"/>
+        <a:cs typeface="Cambria"/>
       </a:majorFont>
       <a:minorFont>
         <a:latin typeface="Calibri" panose="020F0502020204030204"/>
-        <a:ea typeface=""/>
-        <a:cs typeface=""/>
-        <a:font script="Jpan" typeface="游ゴシック"/>
-        <a:font script="Hang" typeface="맑은 고딕"/>
-        <a:font script="Hans" typeface="等线"/>
-        <a:font script="Hant" typeface="新細明體"/>
-        <a:font script="Arab" typeface="Arial"/>
-        <a:font script="Hebr" typeface="Arial"/>
-        <a:font script="Thai" typeface="Cordia New"/>
-        <a:font script="Ethi" typeface="Nyala"/>
-        <a:font script="Beng" typeface="Vrinda"/>
-        <a:font script="Gujr" typeface="Shruti"/>
-        <a:font script="Khmr" typeface="DaunPenh"/>
-        <a:font script="Knda" typeface="Tunga"/>
-        <a:font script="Guru" typeface="Raavi"/>
-        <a:font script="Cans" typeface="Euphemia"/>
-        <a:font script="Cher" typeface="Plantagenet Cherokee"/>
-        <a:font script="Yiii" typeface="Microsoft Yi Baiti"/>
-        <a:font script="Tibt" typeface="Microsoft Himalaya"/>
-        <a:font script="Thaa" typeface="MV Boli"/>
-        <a:font script="Deva" typeface="Mangal"/>
-        <a:font script="Telu" typeface="Gautami"/>
-        <a:font script="Taml" typeface="Latha"/>
-        <a:font script="Syrc" typeface="Estrangelo Edessa"/>
-        <a:font script="Orya" typeface="Kalinga"/>
-        <a:font script="Mlym" typeface="Kartika"/>
-        <a:font script="Laoo" typeface="DokChampa"/>
-        <a:font script="Sinh" typeface="Iskoola Pota"/>
-        <a:font script="Mong" typeface="Mongolian Baiti"/>
-        <a:font script="Viet" typeface="Arial"/>
-        <a:font script="Uigh" typeface="Microsoft Uighur"/>
-        <a:font script="Geor" typeface="Sylfaen"/>
-        <a:font script="Armn" typeface="Arial"/>
-        <a:font script="Bugi" typeface="Leelawadee UI"/>
-        <a:font script="Bopo" typeface="Microsoft JhengHei"/>
-        <a:font script="Java" typeface="Javanese Text"/>
-        <a:font script="Lisu" typeface="Segoe UI"/>
-        <a:font script="Mymr" typeface="Myanmar Text"/>
-        <a:font script="Nkoo" typeface="Ebrima"/>
-        <a:font script="Olck" typeface="Nirmala UI"/>
-        <a:font script="Osma" typeface="Ebrima"/>
-        <a:font script="Phag" typeface="Phagspa"/>
-        <a:font script="Syrn" typeface="Estrangelo Edessa"/>
-        <a:font script="Syrj" typeface="Estrangelo Edessa"/>
-        <a:font script="Syre" typeface="Estrangelo Edessa"/>
-        <a:font script="Sora" typeface="Nirmala UI"/>
-        <a:font script="Tale" typeface="Microsoft Tai Le"/>
-        <a:font script="Talu" typeface="Microsoft New Tai Lue"/>
-        <a:font script="Tfng" typeface="Ebrima"/>
+        <a:ea typeface="Calibri"/>
+        <a:cs typeface="Calibri"/>
       </a:minorFont>
     </a:fontScheme>
     <a:fmtScheme name="Office">

--- a/practice/bai-2-hanh-chinh.pptx
+++ b/practice/bai-2-hanh-chinh.pptx
@@ -3590,7 +3590,7 @@
         <p:spPr>
           <a:xfrm>
             <a:off x="1051560" y="1545336"/>
-            <a:ext cx="10652760" cy="1131570"/>
+            <a:ext cx="10652760" cy="960120"/>
           </a:xfrm>
           <a:prstGeom prst="rect">
             <a:avLst/>
@@ -3642,7 +3642,7 @@
         </p:nvSpPr>
         <p:spPr>
           <a:xfrm>
-            <a:off x="502920" y="2750058"/>
+            <a:off x="502920" y="2578608"/>
             <a:ext cx="384048" cy="384048"/>
           </a:xfrm>
           <a:prstGeom prst="ellipse">
@@ -3666,7 +3666,7 @@
         </p:nvSpPr>
         <p:spPr>
           <a:xfrm>
-            <a:off x="502920" y="2750058"/>
+            <a:off x="502920" y="2578608"/>
             <a:ext cx="384048" cy="384048"/>
           </a:xfrm>
           <a:prstGeom prst="rect">
@@ -3705,8 +3705,8 @@
         </p:nvSpPr>
         <p:spPr>
           <a:xfrm>
-            <a:off x="1051560" y="2676906"/>
-            <a:ext cx="10652760" cy="1131570"/>
+            <a:off x="1051560" y="2505456"/>
+            <a:ext cx="10652760" cy="960120"/>
           </a:xfrm>
           <a:prstGeom prst="rect">
             <a:avLst/>
@@ -3758,7 +3758,7 @@
         </p:nvSpPr>
         <p:spPr>
           <a:xfrm>
-            <a:off x="502920" y="3881628"/>
+            <a:off x="502920" y="3538728"/>
             <a:ext cx="384048" cy="384048"/>
           </a:xfrm>
           <a:prstGeom prst="ellipse">
@@ -3782,7 +3782,7 @@
         </p:nvSpPr>
         <p:spPr>
           <a:xfrm>
-            <a:off x="502920" y="3881628"/>
+            <a:off x="502920" y="3538728"/>
             <a:ext cx="384048" cy="384048"/>
           </a:xfrm>
           <a:prstGeom prst="rect">
@@ -3821,8 +3821,8 @@
         </p:nvSpPr>
         <p:spPr>
           <a:xfrm>
-            <a:off x="1051560" y="3808476"/>
-            <a:ext cx="10652760" cy="1131570"/>
+            <a:off x="1051560" y="3465576"/>
+            <a:ext cx="10652760" cy="960120"/>
           </a:xfrm>
           <a:prstGeom prst="rect">
             <a:avLst/>
@@ -3874,7 +3874,7 @@
         </p:nvSpPr>
         <p:spPr>
           <a:xfrm>
-            <a:off x="502920" y="5013198"/>
+            <a:off x="502920" y="4498848"/>
             <a:ext cx="384048" cy="384048"/>
           </a:xfrm>
           <a:prstGeom prst="ellipse">
@@ -3898,7 +3898,7 @@
         </p:nvSpPr>
         <p:spPr>
           <a:xfrm>
-            <a:off x="502920" y="5013198"/>
+            <a:off x="502920" y="4498848"/>
             <a:ext cx="384048" cy="384048"/>
           </a:xfrm>
           <a:prstGeom prst="rect">
@@ -3937,8 +3937,8 @@
         </p:nvSpPr>
         <p:spPr>
           <a:xfrm>
-            <a:off x="1051560" y="4940046"/>
-            <a:ext cx="10652760" cy="1131570"/>
+            <a:off x="1051560" y="4425696"/>
+            <a:ext cx="10652760" cy="960120"/>
           </a:xfrm>
           <a:prstGeom prst="rect">
             <a:avLst/>
@@ -4257,62 +4257,583 @@
           </a:p>
         </p:txBody>
       </p:sp>
-      <p:pic>
-        <p:nvPicPr>
-          <p:cNvPr id="9" name="Picture 8" descr="c5-chuoi-van-ban-nt.png"/>
-          <p:cNvPicPr>
-            <a:picLocks noChangeAspect="1"/>
-          </p:cNvPicPr>
-          <p:nvPr/>
-        </p:nvPicPr>
-        <p:blipFill>
-          <a:blip r:embed="rId4"/>
-          <a:stretch>
-            <a:fillRect/>
-          </a:stretch>
-        </p:blipFill>
-        <p:spPr>
-          <a:xfrm>
-            <a:off x="981171" y="1481328"/>
-            <a:ext cx="10229353" cy="2940939"/>
-          </a:xfrm>
-          <a:prstGeom prst="rect">
-            <a:avLst/>
-          </a:prstGeom>
-        </p:spPr>
-      </p:pic>
-      <p:sp>
-        <p:nvSpPr>
-          <p:cNvPr id="10" name="TextBox 9"/>
-          <p:cNvSpPr txBox="1"/>
-          <p:nvPr/>
-        </p:nvSpPr>
-        <p:spPr>
-          <a:xfrm>
-            <a:off x="548640" y="4495419"/>
-            <a:ext cx="11109960" cy="310896"/>
-          </a:xfrm>
-          <a:prstGeom prst="rect">
-            <a:avLst/>
-          </a:prstGeom>
-          <a:noFill/>
-        </p:spPr>
-        <p:txBody>
-          <a:bodyPr wrap="square">
-            <a:spAutoFit/>
-          </a:bodyPr>
-          <a:lstStyle/>
-          <a:p>
-            <a:pPr algn="ctr"/>
-            <a:r>
-              <a:rPr sz="1150" i="1">
-                <a:solidFill>
-                  <a:srgbClr val="8A7A76"/>
-                </a:solidFill>
-                <a:latin typeface="Calibri"/>
-              </a:rPr>
-              <a:t>Bài nộp số 2 nằm ở các bước 1 – 3 của chuỗi; bước 4 – 7 là nội dung Bài thực hành số 3.</a:t>
-            </a:r>
+      <p:sp>
+        <p:nvSpPr>
+          <p:cNvPr id="9" name="Shape 6"/>
+          <p:cNvSpPr/>
+          <p:nvPr/>
+        </p:nvSpPr>
+        <p:spPr>
+          <a:xfrm>
+            <a:off x="502920" y="1618488"/>
+            <a:ext cx="384048" cy="384048"/>
+          </a:xfrm>
+          <a:prstGeom prst="ellipse">
+            <a:avLst/>
+          </a:prstGeom>
+          <a:solidFill>
+            <a:srgbClr val="DC756A"/>
+          </a:solidFill>
+          <a:ln/>
+        </p:spPr>
+        <p:txBody>
+          <a:bodyPr/>
+          <a:p/>
+        </p:txBody>
+      </p:sp>
+      <p:sp>
+        <p:nvSpPr>
+          <p:cNvPr id="10" name="Text 7"/>
+          <p:cNvSpPr/>
+          <p:nvPr/>
+        </p:nvSpPr>
+        <p:spPr>
+          <a:xfrm>
+            <a:off x="502920" y="1618488"/>
+            <a:ext cx="384048" cy="384048"/>
+          </a:xfrm>
+          <a:prstGeom prst="rect">
+            <a:avLst/>
+          </a:prstGeom>
+          <a:noFill/>
+          <a:ln/>
+        </p:spPr>
+        <p:txBody>
+          <a:bodyPr wrap="square" lIns="0" tIns="0" rIns="0" bIns="0" rtlCol="0" anchor="ctr"/>
+          <a:lstStyle/>
+          <a:p>
+            <a:pPr algn="ctr" indent="0" marL="0">
+              <a:buNone/>
+            </a:pPr>
+            <a:r>
+              <a:rPr lang="en-US" sz="1400" b="1" dirty="0">
+                <a:solidFill>
+                  <a:srgbClr val="FFFFFF"/>
+                </a:solidFill>
+                <a:latin typeface="Calibri" pitchFamily="34" charset="0"/>
+                <a:ea typeface="Calibri" pitchFamily="34" charset="-122"/>
+                <a:cs typeface="Calibri" pitchFamily="34" charset="-120"/>
+              </a:rPr>
+              <a:t>1</a:t>
+            </a:r>
+            <a:endParaRPr lang="en-US" sz="1400" dirty="0"/>
+          </a:p>
+        </p:txBody>
+      </p:sp>
+      <p:sp>
+        <p:nvSpPr>
+          <p:cNvPr id="11" name="Text 8"/>
+          <p:cNvSpPr/>
+          <p:nvPr/>
+        </p:nvSpPr>
+        <p:spPr>
+          <a:xfrm>
+            <a:off x="1051560" y="1545336"/>
+            <a:ext cx="10652760" cy="905256"/>
+          </a:xfrm>
+          <a:prstGeom prst="rect">
+            <a:avLst/>
+          </a:prstGeom>
+          <a:noFill/>
+          <a:ln/>
+        </p:spPr>
+        <p:txBody>
+          <a:bodyPr wrap="square" lIns="0" tIns="0" rIns="0" bIns="0" rtlCol="0" anchor="t"/>
+          <a:lstStyle/>
+          <a:p>
+            <a:pPr indent="0" marL="0">
+              <a:buNone/>
+            </a:pPr>
+            <a:r>
+              <a:rPr lang="en-US" sz="1400" b="1" dirty="0">
+                <a:solidFill>
+                  <a:srgbClr val="AC4D33"/>
+                </a:solidFill>
+                <a:latin typeface="Calibri" pitchFamily="34" charset="0"/>
+                <a:ea typeface="Calibri" pitchFamily="34" charset="-122"/>
+                <a:cs typeface="Calibri" pitchFamily="34" charset="-120"/>
+              </a:rPr>
+              <a:t>2.1  —  </a:t>
+            </a:r>
+            <a:pPr indent="0" marL="0">
+              <a:buNone/>
+            </a:pPr>
+            <a:r>
+              <a:rPr lang="en-US" sz="1350" dirty="0">
+                <a:solidFill>
+                  <a:srgbClr val="3A2B28"/>
+                </a:solidFill>
+                <a:latin typeface="Calibri" pitchFamily="34" charset="0"/>
+                <a:ea typeface="Calibri" pitchFamily="34" charset="-122"/>
+                <a:cs typeface="Calibri" pitchFamily="34" charset="-120"/>
+              </a:rPr>
+              <a:t>Soạn thảo Quyết định</a:t>
+            </a:r>
+            <a:endParaRPr lang="en-US" sz="1400" dirty="0"/>
+          </a:p>
+        </p:txBody>
+      </p:sp>
+      <p:sp>
+        <p:nvSpPr>
+          <p:cNvPr id="12" name="Shape 9"/>
+          <p:cNvSpPr/>
+          <p:nvPr/>
+        </p:nvSpPr>
+        <p:spPr>
+          <a:xfrm>
+            <a:off x="502920" y="2523744"/>
+            <a:ext cx="384048" cy="384048"/>
+          </a:xfrm>
+          <a:prstGeom prst="ellipse">
+            <a:avLst/>
+          </a:prstGeom>
+          <a:solidFill>
+            <a:srgbClr val="DC756A"/>
+          </a:solidFill>
+          <a:ln/>
+        </p:spPr>
+        <p:txBody>
+          <a:bodyPr/>
+          <a:p/>
+        </p:txBody>
+      </p:sp>
+      <p:sp>
+        <p:nvSpPr>
+          <p:cNvPr id="13" name="Text 10"/>
+          <p:cNvSpPr/>
+          <p:nvPr/>
+        </p:nvSpPr>
+        <p:spPr>
+          <a:xfrm>
+            <a:off x="502920" y="2523744"/>
+            <a:ext cx="384048" cy="384048"/>
+          </a:xfrm>
+          <a:prstGeom prst="rect">
+            <a:avLst/>
+          </a:prstGeom>
+          <a:noFill/>
+          <a:ln/>
+        </p:spPr>
+        <p:txBody>
+          <a:bodyPr wrap="square" lIns="0" tIns="0" rIns="0" bIns="0" rtlCol="0" anchor="ctr"/>
+          <a:lstStyle/>
+          <a:p>
+            <a:pPr algn="ctr" indent="0" marL="0">
+              <a:buNone/>
+            </a:pPr>
+            <a:r>
+              <a:rPr lang="en-US" sz="1400" b="1" dirty="0">
+                <a:solidFill>
+                  <a:srgbClr val="FFFFFF"/>
+                </a:solidFill>
+                <a:latin typeface="Calibri" pitchFamily="34" charset="0"/>
+                <a:ea typeface="Calibri" pitchFamily="34" charset="-122"/>
+                <a:cs typeface="Calibri" pitchFamily="34" charset="-120"/>
+              </a:rPr>
+              <a:t>2</a:t>
+            </a:r>
+            <a:endParaRPr lang="en-US" sz="1400" dirty="0"/>
+          </a:p>
+        </p:txBody>
+      </p:sp>
+      <p:sp>
+        <p:nvSpPr>
+          <p:cNvPr id="14" name="Text 11"/>
+          <p:cNvSpPr/>
+          <p:nvPr/>
+        </p:nvSpPr>
+        <p:spPr>
+          <a:xfrm>
+            <a:off x="1051560" y="2450592"/>
+            <a:ext cx="10652760" cy="905256"/>
+          </a:xfrm>
+          <a:prstGeom prst="rect">
+            <a:avLst/>
+          </a:prstGeom>
+          <a:noFill/>
+          <a:ln/>
+        </p:spPr>
+        <p:txBody>
+          <a:bodyPr wrap="square" lIns="0" tIns="0" rIns="0" bIns="0" rtlCol="0" anchor="t"/>
+          <a:lstStyle/>
+          <a:p>
+            <a:pPr indent="0" marL="0">
+              <a:buNone/>
+            </a:pPr>
+            <a:r>
+              <a:rPr lang="en-US" sz="1400" b="1" dirty="0">
+                <a:solidFill>
+                  <a:srgbClr val="AC4D33"/>
+                </a:solidFill>
+                <a:latin typeface="Calibri" pitchFamily="34" charset="0"/>
+                <a:ea typeface="Calibri" pitchFamily="34" charset="-122"/>
+                <a:cs typeface="Calibri" pitchFamily="34" charset="-120"/>
+              </a:rPr>
+              <a:t>2.2  —  </a:t>
+            </a:r>
+            <a:pPr indent="0" marL="0">
+              <a:buNone/>
+            </a:pPr>
+            <a:r>
+              <a:rPr lang="en-US" sz="1350" dirty="0">
+                <a:solidFill>
+                  <a:srgbClr val="3A2B28"/>
+                </a:solidFill>
+                <a:latin typeface="Calibri" pitchFamily="34" charset="0"/>
+                <a:ea typeface="Calibri" pitchFamily="34" charset="-122"/>
+                <a:cs typeface="Calibri" pitchFamily="34" charset="-120"/>
+              </a:rPr>
+              <a:t>Soạn thảo Tờ trình</a:t>
+            </a:r>
+            <a:endParaRPr lang="en-US" sz="1400" dirty="0"/>
+          </a:p>
+        </p:txBody>
+      </p:sp>
+      <p:sp>
+        <p:nvSpPr>
+          <p:cNvPr id="15" name="Shape 12"/>
+          <p:cNvSpPr/>
+          <p:nvPr/>
+        </p:nvSpPr>
+        <p:spPr>
+          <a:xfrm>
+            <a:off x="502920" y="3429000"/>
+            <a:ext cx="384048" cy="384048"/>
+          </a:xfrm>
+          <a:prstGeom prst="ellipse">
+            <a:avLst/>
+          </a:prstGeom>
+          <a:solidFill>
+            <a:srgbClr val="DC756A"/>
+          </a:solidFill>
+          <a:ln/>
+        </p:spPr>
+        <p:txBody>
+          <a:bodyPr/>
+          <a:p/>
+        </p:txBody>
+      </p:sp>
+      <p:sp>
+        <p:nvSpPr>
+          <p:cNvPr id="16" name="Text 13"/>
+          <p:cNvSpPr/>
+          <p:nvPr/>
+        </p:nvSpPr>
+        <p:spPr>
+          <a:xfrm>
+            <a:off x="502920" y="3429000"/>
+            <a:ext cx="384048" cy="384048"/>
+          </a:xfrm>
+          <a:prstGeom prst="rect">
+            <a:avLst/>
+          </a:prstGeom>
+          <a:noFill/>
+          <a:ln/>
+        </p:spPr>
+        <p:txBody>
+          <a:bodyPr wrap="square" lIns="0" tIns="0" rIns="0" bIns="0" rtlCol="0" anchor="ctr"/>
+          <a:lstStyle/>
+          <a:p>
+            <a:pPr algn="ctr" indent="0" marL="0">
+              <a:buNone/>
+            </a:pPr>
+            <a:r>
+              <a:rPr lang="en-US" sz="1400" b="1" dirty="0">
+                <a:solidFill>
+                  <a:srgbClr val="FFFFFF"/>
+                </a:solidFill>
+                <a:latin typeface="Calibri" pitchFamily="34" charset="0"/>
+                <a:ea typeface="Calibri" pitchFamily="34" charset="-122"/>
+                <a:cs typeface="Calibri" pitchFamily="34" charset="-120"/>
+              </a:rPr>
+              <a:t>3</a:t>
+            </a:r>
+            <a:endParaRPr lang="en-US" sz="1400" dirty="0"/>
+          </a:p>
+        </p:txBody>
+      </p:sp>
+      <p:sp>
+        <p:nvSpPr>
+          <p:cNvPr id="17" name="Text 14"/>
+          <p:cNvSpPr/>
+          <p:nvPr/>
+        </p:nvSpPr>
+        <p:spPr>
+          <a:xfrm>
+            <a:off x="1051560" y="3355848"/>
+            <a:ext cx="10652760" cy="905256"/>
+          </a:xfrm>
+          <a:prstGeom prst="rect">
+            <a:avLst/>
+          </a:prstGeom>
+          <a:noFill/>
+          <a:ln/>
+        </p:spPr>
+        <p:txBody>
+          <a:bodyPr wrap="square" lIns="0" tIns="0" rIns="0" bIns="0" rtlCol="0" anchor="t"/>
+          <a:lstStyle/>
+          <a:p>
+            <a:pPr indent="0" marL="0">
+              <a:buNone/>
+            </a:pPr>
+            <a:r>
+              <a:rPr lang="en-US" sz="1400" b="1" dirty="0">
+                <a:solidFill>
+                  <a:srgbClr val="AC4D33"/>
+                </a:solidFill>
+                <a:latin typeface="Calibri" pitchFamily="34" charset="0"/>
+                <a:ea typeface="Calibri" pitchFamily="34" charset="-122"/>
+                <a:cs typeface="Calibri" pitchFamily="34" charset="-120"/>
+              </a:rPr>
+              <a:t>2.3  —  </a:t>
+            </a:r>
+            <a:pPr indent="0" marL="0">
+              <a:buNone/>
+            </a:pPr>
+            <a:r>
+              <a:rPr lang="en-US" sz="1350" dirty="0">
+                <a:solidFill>
+                  <a:srgbClr val="3A2B28"/>
+                </a:solidFill>
+                <a:latin typeface="Calibri" pitchFamily="34" charset="0"/>
+                <a:ea typeface="Calibri" pitchFamily="34" charset="-122"/>
+                <a:cs typeface="Calibri" pitchFamily="34" charset="-120"/>
+              </a:rPr>
+              <a:t>Soạn thảo các loại công văn</a:t>
+            </a:r>
+            <a:endParaRPr lang="en-US" sz="1400" dirty="0"/>
+          </a:p>
+        </p:txBody>
+      </p:sp>
+      <p:sp>
+        <p:nvSpPr>
+          <p:cNvPr id="18" name="Shape 15"/>
+          <p:cNvSpPr/>
+          <p:nvPr/>
+        </p:nvSpPr>
+        <p:spPr>
+          <a:xfrm>
+            <a:off x="502920" y="4334256"/>
+            <a:ext cx="384048" cy="384048"/>
+          </a:xfrm>
+          <a:prstGeom prst="ellipse">
+            <a:avLst/>
+          </a:prstGeom>
+          <a:solidFill>
+            <a:srgbClr val="DC756A"/>
+          </a:solidFill>
+          <a:ln/>
+        </p:spPr>
+        <p:txBody>
+          <a:bodyPr/>
+          <a:p/>
+        </p:txBody>
+      </p:sp>
+      <p:sp>
+        <p:nvSpPr>
+          <p:cNvPr id="19" name="Text 16"/>
+          <p:cNvSpPr/>
+          <p:nvPr/>
+        </p:nvSpPr>
+        <p:spPr>
+          <a:xfrm>
+            <a:off x="502920" y="4334256"/>
+            <a:ext cx="384048" cy="384048"/>
+          </a:xfrm>
+          <a:prstGeom prst="rect">
+            <a:avLst/>
+          </a:prstGeom>
+          <a:noFill/>
+          <a:ln/>
+        </p:spPr>
+        <p:txBody>
+          <a:bodyPr wrap="square" lIns="0" tIns="0" rIns="0" bIns="0" rtlCol="0" anchor="ctr"/>
+          <a:lstStyle/>
+          <a:p>
+            <a:pPr algn="ctr" indent="0" marL="0">
+              <a:buNone/>
+            </a:pPr>
+            <a:r>
+              <a:rPr lang="en-US" sz="1400" b="1" dirty="0">
+                <a:solidFill>
+                  <a:srgbClr val="FFFFFF"/>
+                </a:solidFill>
+                <a:latin typeface="Calibri" pitchFamily="34" charset="0"/>
+                <a:ea typeface="Calibri" pitchFamily="34" charset="-122"/>
+                <a:cs typeface="Calibri" pitchFamily="34" charset="-120"/>
+              </a:rPr>
+              <a:t>4</a:t>
+            </a:r>
+            <a:endParaRPr lang="en-US" sz="1400" dirty="0"/>
+          </a:p>
+        </p:txBody>
+      </p:sp>
+      <p:sp>
+        <p:nvSpPr>
+          <p:cNvPr id="20" name="Text 17"/>
+          <p:cNvSpPr/>
+          <p:nvPr/>
+        </p:nvSpPr>
+        <p:spPr>
+          <a:xfrm>
+            <a:off x="1051560" y="4261104"/>
+            <a:ext cx="10652760" cy="905256"/>
+          </a:xfrm>
+          <a:prstGeom prst="rect">
+            <a:avLst/>
+          </a:prstGeom>
+          <a:noFill/>
+          <a:ln/>
+        </p:spPr>
+        <p:txBody>
+          <a:bodyPr wrap="square" lIns="0" tIns="0" rIns="0" bIns="0" rtlCol="0" anchor="t"/>
+          <a:lstStyle/>
+          <a:p>
+            <a:pPr indent="0" marL="0">
+              <a:buNone/>
+            </a:pPr>
+            <a:r>
+              <a:rPr lang="en-US" sz="1400" b="1" dirty="0">
+                <a:solidFill>
+                  <a:srgbClr val="AC4D33"/>
+                </a:solidFill>
+                <a:latin typeface="Calibri" pitchFamily="34" charset="0"/>
+                <a:ea typeface="Calibri" pitchFamily="34" charset="-122"/>
+                <a:cs typeface="Calibri" pitchFamily="34" charset="-120"/>
+              </a:rPr>
+              <a:t>2.4  —  </a:t>
+            </a:r>
+            <a:pPr indent="0" marL="0">
+              <a:buNone/>
+            </a:pPr>
+            <a:r>
+              <a:rPr lang="en-US" sz="1350" dirty="0">
+                <a:solidFill>
+                  <a:srgbClr val="3A2B28"/>
+                </a:solidFill>
+                <a:latin typeface="Calibri" pitchFamily="34" charset="0"/>
+                <a:ea typeface="Calibri" pitchFamily="34" charset="-122"/>
+                <a:cs typeface="Calibri" pitchFamily="34" charset="-120"/>
+              </a:rPr>
+              <a:t>Soạn thảo Biên bản</a:t>
+            </a:r>
+            <a:endParaRPr lang="en-US" sz="1400" dirty="0"/>
+          </a:p>
+        </p:txBody>
+      </p:sp>
+      <p:sp>
+        <p:nvSpPr>
+          <p:cNvPr id="21" name="Shape 18"/>
+          <p:cNvSpPr/>
+          <p:nvPr/>
+        </p:nvSpPr>
+        <p:spPr>
+          <a:xfrm>
+            <a:off x="502920" y="5239512"/>
+            <a:ext cx="384048" cy="384048"/>
+          </a:xfrm>
+          <a:prstGeom prst="ellipse">
+            <a:avLst/>
+          </a:prstGeom>
+          <a:solidFill>
+            <a:srgbClr val="DC756A"/>
+          </a:solidFill>
+          <a:ln/>
+        </p:spPr>
+        <p:txBody>
+          <a:bodyPr/>
+          <a:p/>
+        </p:txBody>
+      </p:sp>
+      <p:sp>
+        <p:nvSpPr>
+          <p:cNvPr id="22" name="Text 19"/>
+          <p:cNvSpPr/>
+          <p:nvPr/>
+        </p:nvSpPr>
+        <p:spPr>
+          <a:xfrm>
+            <a:off x="502920" y="5239512"/>
+            <a:ext cx="384048" cy="384048"/>
+          </a:xfrm>
+          <a:prstGeom prst="rect">
+            <a:avLst/>
+          </a:prstGeom>
+          <a:noFill/>
+          <a:ln/>
+        </p:spPr>
+        <p:txBody>
+          <a:bodyPr wrap="square" lIns="0" tIns="0" rIns="0" bIns="0" rtlCol="0" anchor="ctr"/>
+          <a:lstStyle/>
+          <a:p>
+            <a:pPr algn="ctr" indent="0" marL="0">
+              <a:buNone/>
+            </a:pPr>
+            <a:r>
+              <a:rPr lang="en-US" sz="1400" b="1" dirty="0">
+                <a:solidFill>
+                  <a:srgbClr val="FFFFFF"/>
+                </a:solidFill>
+                <a:latin typeface="Calibri" pitchFamily="34" charset="0"/>
+                <a:ea typeface="Calibri" pitchFamily="34" charset="-122"/>
+                <a:cs typeface="Calibri" pitchFamily="34" charset="-120"/>
+              </a:rPr>
+              <a:t>5</a:t>
+            </a:r>
+            <a:endParaRPr lang="en-US" sz="1400" dirty="0"/>
+          </a:p>
+        </p:txBody>
+      </p:sp>
+      <p:sp>
+        <p:nvSpPr>
+          <p:cNvPr id="23" name="Text 20"/>
+          <p:cNvSpPr/>
+          <p:nvPr/>
+        </p:nvSpPr>
+        <p:spPr>
+          <a:xfrm>
+            <a:off x="1051560" y="5166360"/>
+            <a:ext cx="10652760" cy="905256"/>
+          </a:xfrm>
+          <a:prstGeom prst="rect">
+            <a:avLst/>
+          </a:prstGeom>
+          <a:noFill/>
+          <a:ln/>
+        </p:spPr>
+        <p:txBody>
+          <a:bodyPr wrap="square" lIns="0" tIns="0" rIns="0" bIns="0" rtlCol="0" anchor="t"/>
+          <a:lstStyle/>
+          <a:p>
+            <a:pPr indent="0" marL="0">
+              <a:buNone/>
+            </a:pPr>
+            <a:r>
+              <a:rPr lang="en-US" sz="1400" b="1" dirty="0">
+                <a:solidFill>
+                  <a:srgbClr val="AC4D33"/>
+                </a:solidFill>
+                <a:latin typeface="Calibri" pitchFamily="34" charset="0"/>
+                <a:ea typeface="Calibri" pitchFamily="34" charset="-122"/>
+                <a:cs typeface="Calibri" pitchFamily="34" charset="-120"/>
+              </a:rPr>
+              <a:t>2.5  —  </a:t>
+            </a:r>
+            <a:pPr indent="0" marL="0">
+              <a:buNone/>
+            </a:pPr>
+            <a:r>
+              <a:rPr lang="en-US" sz="1350" dirty="0">
+                <a:solidFill>
+                  <a:srgbClr val="3A2B28"/>
+                </a:solidFill>
+                <a:latin typeface="Calibri" pitchFamily="34" charset="0"/>
+                <a:ea typeface="Calibri" pitchFamily="34" charset="-122"/>
+                <a:cs typeface="Calibri" pitchFamily="34" charset="-120"/>
+              </a:rPr>
+              <a:t>Soạn thảo Báo cáo</a:t>
+            </a:r>
+            <a:endParaRPr lang="en-US" sz="1400" dirty="0"/>
           </a:p>
         </p:txBody>
       </p:sp>
@@ -5401,264 +5922,62 @@
           </a:p>
         </p:txBody>
       </p:sp>
-      <p:sp>
-        <p:nvSpPr>
-          <p:cNvPr id="9" name="Shape 6"/>
-          <p:cNvSpPr/>
-          <p:nvPr/>
-        </p:nvSpPr>
-        <p:spPr>
-          <a:xfrm>
-            <a:off x="502920" y="1417320"/>
-            <a:ext cx="11201400" cy="1490472"/>
-          </a:xfrm>
-          <a:prstGeom prst="roundRect">
-            <a:avLst>
-              <a:gd name="adj" fmla="val 5521"/>
-            </a:avLst>
-          </a:prstGeom>
-          <a:solidFill>
-            <a:srgbClr val="FDF1EF"/>
-          </a:solidFill>
-          <a:ln w="15875">
-            <a:solidFill>
-              <a:srgbClr val="FBCEC9"/>
-            </a:solidFill>
-            <a:prstDash val="solid"/>
-          </a:ln>
-        </p:spPr>
-        <p:txBody>
-          <a:bodyPr/>
-          <a:p/>
-        </p:txBody>
-      </p:sp>
-      <p:sp>
-        <p:nvSpPr>
-          <p:cNvPr id="10" name="Text 7"/>
-          <p:cNvSpPr/>
-          <p:nvPr/>
-        </p:nvSpPr>
-        <p:spPr>
-          <a:xfrm>
-            <a:off x="722376" y="1472184"/>
-            <a:ext cx="10762488" cy="1380744"/>
-          </a:xfrm>
-          <a:prstGeom prst="rect">
-            <a:avLst/>
-          </a:prstGeom>
-          <a:noFill/>
-          <a:ln/>
-        </p:spPr>
-        <p:txBody>
-          <a:bodyPr wrap="square" lIns="0" tIns="0" rIns="0" bIns="0" rtlCol="0" anchor="ctr"/>
-          <a:lstStyle/>
-          <a:p>
-            <a:pPr indent="0" marL="0">
-              <a:buNone/>
-            </a:pPr>
-            <a:r>
-              <a:rPr lang="en-US" sz="1500" b="1" dirty="0">
-                <a:solidFill>
-                  <a:srgbClr val="AC4D33"/>
-                </a:solidFill>
-                <a:latin typeface="Calibri" pitchFamily="34" charset="0"/>
-                <a:ea typeface="Calibri" pitchFamily="34" charset="-122"/>
-                <a:cs typeface="Calibri" pitchFamily="34" charset="-120"/>
-              </a:rPr>
-              <a:t>Khung câu chữ phần căn cứ</a:t>
-            </a:r>
-            <a:endParaRPr lang="en-US" sz="1500" dirty="0"/>
-          </a:p>
-          <a:p>
-            <a:pPr indent="0" marL="0">
-              <a:buNone/>
-            </a:pPr>
-            <a:r>
-              <a:rPr lang="en-US" sz="1300" dirty="0">
-                <a:solidFill>
-                  <a:srgbClr val="3A2B28"/>
-                </a:solidFill>
-                <a:latin typeface="Calibri" pitchFamily="34" charset="0"/>
-                <a:ea typeface="Calibri" pitchFamily="34" charset="-122"/>
-                <a:cs typeface="Calibri" pitchFamily="34" charset="-120"/>
-              </a:rPr>
-              <a:t>“Căn cứ [văn bản quy định chức năng, nhiệm vụ]; Căn cứ [văn bản chuyên ngành liên quan]; Xét đề nghị của [đơn vị/cá nhân đề xuất].” — mỗi dòng kết thúc bằng dấu chấm phẩy, dòng cuối dấu chấm.</a:t>
-            </a:r>
-            <a:endParaRPr lang="en-US" sz="1500" dirty="0"/>
-          </a:p>
-        </p:txBody>
-      </p:sp>
-      <p:sp>
-        <p:nvSpPr>
-          <p:cNvPr id="11" name="Shape 8"/>
-          <p:cNvSpPr/>
-          <p:nvPr/>
-        </p:nvSpPr>
-        <p:spPr>
-          <a:xfrm>
-            <a:off x="502920" y="3072384"/>
-            <a:ext cx="11201400" cy="1490472"/>
-          </a:xfrm>
-          <a:prstGeom prst="roundRect">
-            <a:avLst>
-              <a:gd name="adj" fmla="val 5521"/>
-            </a:avLst>
-          </a:prstGeom>
-          <a:solidFill>
-            <a:srgbClr val="FDF1EF"/>
-          </a:solidFill>
-          <a:ln w="15875">
-            <a:solidFill>
-              <a:srgbClr val="FBCEC9"/>
-            </a:solidFill>
-            <a:prstDash val="solid"/>
-          </a:ln>
-        </p:spPr>
-        <p:txBody>
-          <a:bodyPr/>
-          <a:p/>
-        </p:txBody>
-      </p:sp>
-      <p:sp>
-        <p:nvSpPr>
-          <p:cNvPr id="12" name="Text 9"/>
-          <p:cNvSpPr/>
-          <p:nvPr/>
-        </p:nvSpPr>
-        <p:spPr>
-          <a:xfrm>
-            <a:off x="722376" y="3127248"/>
-            <a:ext cx="10762488" cy="1380744"/>
-          </a:xfrm>
-          <a:prstGeom prst="rect">
-            <a:avLst/>
-          </a:prstGeom>
-          <a:noFill/>
-          <a:ln/>
-        </p:spPr>
-        <p:txBody>
-          <a:bodyPr wrap="square" lIns="0" tIns="0" rIns="0" bIns="0" rtlCol="0" anchor="ctr"/>
-          <a:lstStyle/>
-          <a:p>
-            <a:pPr indent="0" marL="0">
-              <a:buNone/>
-            </a:pPr>
-            <a:r>
-              <a:rPr lang="en-US" sz="1500" b="1" dirty="0">
-                <a:solidFill>
-                  <a:srgbClr val="AC4D33"/>
-                </a:solidFill>
-                <a:latin typeface="Calibri" pitchFamily="34" charset="0"/>
-                <a:ea typeface="Calibri" pitchFamily="34" charset="-122"/>
-                <a:cs typeface="Calibri" pitchFamily="34" charset="-120"/>
-              </a:rPr>
-              <a:t>Phần nội dung</a:t>
-            </a:r>
-            <a:endParaRPr lang="en-US" sz="1500" dirty="0"/>
-          </a:p>
-          <a:p>
-            <a:pPr indent="0" marL="0">
-              <a:buNone/>
-            </a:pPr>
-            <a:r>
-              <a:rPr lang="en-US" sz="1300" dirty="0">
-                <a:solidFill>
-                  <a:srgbClr val="3A2B28"/>
-                </a:solidFill>
-                <a:latin typeface="Calibri" pitchFamily="34" charset="0"/>
-                <a:ea typeface="Calibri" pitchFamily="34" charset="-122"/>
-                <a:cs typeface="Calibri" pitchFamily="34" charset="-120"/>
-              </a:rPr>
-              <a:t>“QUYẾT ĐỊNH:” canh giữa, viết hoa, in đậm → Điều 1 (nội dung chính) → Điều 2 (trách nhiệm, kinh phí…) → Điều cuối: hiệu lực thi hành và đối tượng chịu trách nhiệm thi hành.</a:t>
-            </a:r>
-            <a:endParaRPr lang="en-US" sz="1500" dirty="0"/>
-          </a:p>
-        </p:txBody>
-      </p:sp>
-      <p:sp>
-        <p:nvSpPr>
-          <p:cNvPr id="13" name="Shape 10"/>
-          <p:cNvSpPr/>
-          <p:nvPr/>
-        </p:nvSpPr>
-        <p:spPr>
-          <a:xfrm>
-            <a:off x="502920" y="4727448"/>
-            <a:ext cx="11201400" cy="1490472"/>
-          </a:xfrm>
-          <a:prstGeom prst="roundRect">
-            <a:avLst>
-              <a:gd name="adj" fmla="val 5521"/>
-            </a:avLst>
-          </a:prstGeom>
-          <a:solidFill>
-            <a:srgbClr val="FDF1EF"/>
-          </a:solidFill>
-          <a:ln w="15875">
-            <a:solidFill>
-              <a:srgbClr val="FBCEC9"/>
-            </a:solidFill>
-            <a:prstDash val="solid"/>
-          </a:ln>
-        </p:spPr>
-        <p:txBody>
-          <a:bodyPr/>
-          <a:p/>
-        </p:txBody>
-      </p:sp>
-      <p:sp>
-        <p:nvSpPr>
-          <p:cNvPr id="14" name="Text 11"/>
-          <p:cNvSpPr/>
-          <p:nvPr/>
-        </p:nvSpPr>
-        <p:spPr>
-          <a:xfrm>
-            <a:off x="722376" y="4782312"/>
-            <a:ext cx="10762488" cy="1380744"/>
-          </a:xfrm>
-          <a:prstGeom prst="rect">
-            <a:avLst/>
-          </a:prstGeom>
-          <a:noFill/>
-          <a:ln/>
-        </p:spPr>
-        <p:txBody>
-          <a:bodyPr wrap="square" lIns="0" tIns="0" rIns="0" bIns="0" rtlCol="0" anchor="ctr"/>
-          <a:lstStyle/>
-          <a:p>
-            <a:pPr indent="0" marL="0">
-              <a:buNone/>
-            </a:pPr>
-            <a:r>
-              <a:rPr lang="en-US" sz="1500" b="1" dirty="0">
-                <a:solidFill>
-                  <a:srgbClr val="AC4D33"/>
-                </a:solidFill>
-                <a:latin typeface="Calibri" pitchFamily="34" charset="0"/>
-                <a:ea typeface="Calibri" pitchFamily="34" charset="-122"/>
-                <a:cs typeface="Calibri" pitchFamily="34" charset="-120"/>
-              </a:rPr>
-              <a:t>Lỗi thường gặp</a:t>
-            </a:r>
-            <a:endParaRPr lang="en-US" sz="1500" dirty="0"/>
-          </a:p>
-          <a:p>
-            <a:pPr indent="0" marL="0">
-              <a:buNone/>
-            </a:pPr>
-            <a:r>
-              <a:rPr lang="en-US" sz="1300" dirty="0">
-                <a:solidFill>
-                  <a:srgbClr val="3A2B28"/>
-                </a:solidFill>
-                <a:latin typeface="Calibri" pitchFamily="34" charset="0"/>
-                <a:ea typeface="Calibri" pitchFamily="34" charset="-122"/>
-                <a:cs typeface="Calibri" pitchFamily="34" charset="-120"/>
-              </a:rPr>
-              <a:t>Căn cứ không đúng thẩm quyền • thiếu điều khoản hiệu lực • dùng từ “yêu cầu”, “đề nghị” trong quyết định (phải dùng ngôn ngữ mệnh lệnh) • số ký hiệu sai (đúng: Số: …/QĐ-…).</a:t>
-            </a:r>
-            <a:endParaRPr lang="en-US" sz="1500" dirty="0"/>
+      <p:pic>
+        <p:nvPicPr>
+          <p:cNvPr id="9" name="Picture 8" descr="c5-chuoi-van-ban-nt.png"/>
+          <p:cNvPicPr>
+            <a:picLocks noChangeAspect="1"/>
+          </p:cNvPicPr>
+          <p:nvPr/>
+        </p:nvPicPr>
+        <p:blipFill>
+          <a:blip r:embed="rId4"/>
+          <a:stretch>
+            <a:fillRect/>
+          </a:stretch>
+        </p:blipFill>
+        <p:spPr>
+          <a:xfrm>
+            <a:off x="981171" y="1481328"/>
+            <a:ext cx="10229353" cy="2940939"/>
+          </a:xfrm>
+          <a:prstGeom prst="rect">
+            <a:avLst/>
+          </a:prstGeom>
+        </p:spPr>
+      </p:pic>
+      <p:sp>
+        <p:nvSpPr>
+          <p:cNvPr id="10" name="TextBox 9"/>
+          <p:cNvSpPr txBox="1"/>
+          <p:nvPr/>
+        </p:nvSpPr>
+        <p:spPr>
+          <a:xfrm>
+            <a:off x="548640" y="4495419"/>
+            <a:ext cx="11109960" cy="310896"/>
+          </a:xfrm>
+          <a:prstGeom prst="rect">
+            <a:avLst/>
+          </a:prstGeom>
+          <a:noFill/>
+        </p:spPr>
+        <p:txBody>
+          <a:bodyPr wrap="square">
+            <a:spAutoFit/>
+          </a:bodyPr>
+          <a:lstStyle/>
+          <a:p>
+            <a:pPr algn="ctr"/>
+            <a:r>
+              <a:rPr sz="1150" i="1">
+                <a:solidFill>
+                  <a:srgbClr val="8A7A76"/>
+                </a:solidFill>
+                <a:latin typeface="Calibri"/>
+              </a:rPr>
+              <a:t>Bài nộp số 2 nằm ở các bước 1 – 3 của chuỗi; bước 4 – 7 là nội dung Bài thực hành số 3.</a:t>
+            </a:r>
           </a:p>
         </p:txBody>
       </p:sp>

--- a/practice/bai-2-hanh-chinh.pptx
+++ b/practice/bai-2-hanh-chinh.pptx
@@ -1846,7 +1846,7 @@
       </p:sp>
       <p:pic>
         <p:nvPicPr>
-          <p:cNvPr id="3" name="Image 0" descr="assets/logo_tron.png">    </p:cNvPr>
+          <p:cNvPr id="3" name="Image 0" descr="/home/user/comdraft/assets/img/dau-huong.png">    </p:cNvPr>
           <p:cNvPicPr>
             <a:picLocks noChangeAspect="1"/>
           </p:cNvPicPr>
@@ -1872,7 +1872,7 @@
       </p:pic>
       <p:pic>
         <p:nvPicPr>
-          <p:cNvPr id="4" name="Image 1" descr="assets/logo_ngang.png">    </p:cNvPr>
+          <p:cNvPr id="4" name="Image 1" descr="/home/user/comdraft/assets/img/lockup-huong.png">    </p:cNvPr>
           <p:cNvPicPr>
             <a:picLocks noChangeAspect="1"/>
           </p:cNvPicPr>
@@ -2205,7 +2205,7 @@
       </p:grpSpPr>
       <p:pic>
         <p:nvPicPr>
-          <p:cNvPr id="2" name="Image 0" descr="assets/logo_tron.png">    </p:cNvPr>
+          <p:cNvPr id="2" name="Image 0" descr="/home/user/comdraft/assets/img/dau-huong.png">    </p:cNvPr>
           <p:cNvPicPr>
             <a:picLocks noChangeAspect="1"/>
           </p:cNvPicPr>
@@ -2741,7 +2741,7 @@
       </p:grpSpPr>
       <p:pic>
         <p:nvPicPr>
-          <p:cNvPr id="2" name="Image 0" descr="assets/logo_tron.png">    </p:cNvPr>
+          <p:cNvPr id="2" name="Image 0" descr="/home/user/comdraft/assets/img/dau-huong.png">    </p:cNvPr>
           <p:cNvPicPr>
             <a:picLocks noChangeAspect="1"/>
           </p:cNvPicPr>
@@ -3277,7 +3277,7 @@
       </p:grpSpPr>
       <p:pic>
         <p:nvPicPr>
-          <p:cNvPr id="2" name="Image 0" descr="assets/logo_tron.png">    </p:cNvPr>
+          <p:cNvPr id="2" name="Image 0" descr="/home/user/comdraft/assets/img/dau-huong.png">    </p:cNvPr>
           <p:cNvPicPr>
             <a:picLocks noChangeAspect="1"/>
           </p:cNvPicPr>
@@ -4016,7 +4016,7 @@
       </p:grpSpPr>
       <p:pic>
         <p:nvPicPr>
-          <p:cNvPr id="2" name="Image 0" descr="assets/logo_tron.png">    </p:cNvPr>
+          <p:cNvPr id="2" name="Image 0" descr="/home/user/comdraft/assets/img/dau-huong.png">    </p:cNvPr>
           <p:cNvPicPr>
             <a:picLocks noChangeAspect="1"/>
           </p:cNvPicPr>
@@ -4871,7 +4871,7 @@
       </p:grpSpPr>
       <p:pic>
         <p:nvPicPr>
-          <p:cNvPr id="2" name="Image 0" descr="assets/logo_tron.png">    </p:cNvPr>
+          <p:cNvPr id="2" name="Image 0" descr="/home/user/comdraft/assets/img/dau-huong.png">    </p:cNvPr>
           <p:cNvPicPr>
             <a:picLocks noChangeAspect="1"/>
           </p:cNvPicPr>
@@ -5681,7 +5681,7 @@
       </p:grpSpPr>
       <p:pic>
         <p:nvPicPr>
-          <p:cNvPr id="2" name="Image 0" descr="assets/logo_tron.png">    </p:cNvPr>
+          <p:cNvPr id="2" name="Image 0" descr="/home/user/comdraft/assets/img/dau-huong.png">    </p:cNvPr>
           <p:cNvPicPr>
             <a:picLocks noChangeAspect="1"/>
           </p:cNvPicPr>
@@ -5938,7 +5938,7 @@
         </p:blipFill>
         <p:spPr>
           <a:xfrm>
-            <a:off x="981171" y="1481328"/>
+            <a:off x="981171" y="2365438"/>
             <a:ext cx="10229353" cy="2940939"/>
           </a:xfrm>
           <a:prstGeom prst="rect">
@@ -5954,7 +5954,7 @@
         </p:nvSpPr>
         <p:spPr>
           <a:xfrm>
-            <a:off x="548640" y="4495419"/>
+            <a:off x="548640" y="5379529"/>
             <a:ext cx="11109960" cy="310896"/>
           </a:xfrm>
           <a:prstGeom prst="rect">
@@ -6015,7 +6015,7 @@
       </p:grpSpPr>
       <p:pic>
         <p:nvPicPr>
-          <p:cNvPr id="2" name="Image 0" descr="assets/logo_tron.png">    </p:cNvPr>
+          <p:cNvPr id="2" name="Image 0" descr="/home/user/comdraft/assets/img/dau-huong.png">    </p:cNvPr>
           <p:cNvPicPr>
             <a:picLocks noChangeAspect="1"/>
           </p:cNvPicPr>
@@ -6638,7 +6638,7 @@
       </p:grpSpPr>
       <p:pic>
         <p:nvPicPr>
-          <p:cNvPr id="2" name="Image 0" descr="assets/logo_tron.png">    </p:cNvPr>
+          <p:cNvPr id="2" name="Image 0" descr="/home/user/comdraft/assets/img/dau-huong.png">    </p:cNvPr>
           <p:cNvPicPr>
             <a:picLocks noChangeAspect="1"/>
           </p:cNvPicPr>
@@ -7261,7 +7261,7 @@
       </p:grpSpPr>
       <p:pic>
         <p:nvPicPr>
-          <p:cNvPr id="2" name="Image 0" descr="assets/logo_tron.png">    </p:cNvPr>
+          <p:cNvPr id="2" name="Image 0" descr="/home/user/comdraft/assets/img/dau-huong.png">    </p:cNvPr>
           <p:cNvPicPr>
             <a:picLocks noChangeAspect="1"/>
           </p:cNvPicPr>
@@ -7884,7 +7884,7 @@
       </p:grpSpPr>
       <p:pic>
         <p:nvPicPr>
-          <p:cNvPr id="2" name="Image 0" descr="assets/logo_tron.png">    </p:cNvPr>
+          <p:cNvPr id="2" name="Image 0" descr="/home/user/comdraft/assets/img/dau-huong.png">    </p:cNvPr>
           <p:cNvPicPr>
             <a:picLocks noChangeAspect="1"/>
           </p:cNvPicPr>
@@ -8632,14 +8632,108 @@
     </a:clrScheme>
     <a:fontScheme name="Office">
       <a:majorFont>
-        <a:latin typeface="Cambria" panose="020F0302020204030204"/>
-        <a:ea typeface="Cambria"/>
-        <a:cs typeface="Cambria"/>
+        <a:latin typeface="Calibri Light" panose="020F0302020204030204"/>
+        <a:ea typeface=""/>
+        <a:cs typeface=""/>
+        <a:font script="Jpan" typeface="游ゴシック Light"/>
+        <a:font script="Hang" typeface="맑은 고딕"/>
+        <a:font script="Hans" typeface="等线 Light"/>
+        <a:font script="Hant" typeface="新細明體"/>
+        <a:font script="Arab" typeface="Times New Roman"/>
+        <a:font script="Hebr" typeface="Times New Roman"/>
+        <a:font script="Thai" typeface="Angsana New"/>
+        <a:font script="Ethi" typeface="Nyala"/>
+        <a:font script="Beng" typeface="Vrinda"/>
+        <a:font script="Gujr" typeface="Shruti"/>
+        <a:font script="Khmr" typeface="MoolBoran"/>
+        <a:font script="Knda" typeface="Tunga"/>
+        <a:font script="Guru" typeface="Raavi"/>
+        <a:font script="Cans" typeface="Euphemia"/>
+        <a:font script="Cher" typeface="Plantagenet Cherokee"/>
+        <a:font script="Yiii" typeface="Microsoft Yi Baiti"/>
+        <a:font script="Tibt" typeface="Microsoft Himalaya"/>
+        <a:font script="Thaa" typeface="MV Boli"/>
+        <a:font script="Deva" typeface="Mangal"/>
+        <a:font script="Telu" typeface="Gautami"/>
+        <a:font script="Taml" typeface="Latha"/>
+        <a:font script="Syrc" typeface="Estrangelo Edessa"/>
+        <a:font script="Orya" typeface="Kalinga"/>
+        <a:font script="Mlym" typeface="Kartika"/>
+        <a:font script="Laoo" typeface="DokChampa"/>
+        <a:font script="Sinh" typeface="Iskoola Pota"/>
+        <a:font script="Mong" typeface="Mongolian Baiti"/>
+        <a:font script="Viet" typeface="Times New Roman"/>
+        <a:font script="Uigh" typeface="Microsoft Uighur"/>
+        <a:font script="Geor" typeface="Sylfaen"/>
+        <a:font script="Armn" typeface="Arial"/>
+        <a:font script="Bugi" typeface="Leelawadee UI"/>
+        <a:font script="Bopo" typeface="Microsoft JhengHei"/>
+        <a:font script="Java" typeface="Javanese Text"/>
+        <a:font script="Lisu" typeface="Segoe UI"/>
+        <a:font script="Mymr" typeface="Myanmar Text"/>
+        <a:font script="Nkoo" typeface="Ebrima"/>
+        <a:font script="Olck" typeface="Nirmala UI"/>
+        <a:font script="Osma" typeface="Ebrima"/>
+        <a:font script="Phag" typeface="Phagspa"/>
+        <a:font script="Syrn" typeface="Estrangelo Edessa"/>
+        <a:font script="Syrj" typeface="Estrangelo Edessa"/>
+        <a:font script="Syre" typeface="Estrangelo Edessa"/>
+        <a:font script="Sora" typeface="Nirmala UI"/>
+        <a:font script="Tale" typeface="Microsoft Tai Le"/>
+        <a:font script="Talu" typeface="Microsoft New Tai Lue"/>
+        <a:font script="Tfng" typeface="Ebrima"/>
       </a:majorFont>
       <a:minorFont>
         <a:latin typeface="Calibri" panose="020F0502020204030204"/>
-        <a:ea typeface="Calibri"/>
-        <a:cs typeface="Calibri"/>
+        <a:ea typeface=""/>
+        <a:cs typeface=""/>
+        <a:font script="Jpan" typeface="游ゴシック"/>
+        <a:font script="Hang" typeface="맑은 고딕"/>
+        <a:font script="Hans" typeface="等线"/>
+        <a:font script="Hant" typeface="新細明體"/>
+        <a:font script="Arab" typeface="Arial"/>
+        <a:font script="Hebr" typeface="Arial"/>
+        <a:font script="Thai" typeface="Cordia New"/>
+        <a:font script="Ethi" typeface="Nyala"/>
+        <a:font script="Beng" typeface="Vrinda"/>
+        <a:font script="Gujr" typeface="Shruti"/>
+        <a:font script="Khmr" typeface="DaunPenh"/>
+        <a:font script="Knda" typeface="Tunga"/>
+        <a:font script="Guru" typeface="Raavi"/>
+        <a:font script="Cans" typeface="Euphemia"/>
+        <a:font script="Cher" typeface="Plantagenet Cherokee"/>
+        <a:font script="Yiii" typeface="Microsoft Yi Baiti"/>
+        <a:font script="Tibt" typeface="Microsoft Himalaya"/>
+        <a:font script="Thaa" typeface="MV Boli"/>
+        <a:font script="Deva" typeface="Mangal"/>
+        <a:font script="Telu" typeface="Gautami"/>
+        <a:font script="Taml" typeface="Latha"/>
+        <a:font script="Syrc" typeface="Estrangelo Edessa"/>
+        <a:font script="Orya" typeface="Kalinga"/>
+        <a:font script="Mlym" typeface="Kartika"/>
+        <a:font script="Laoo" typeface="DokChampa"/>
+        <a:font script="Sinh" typeface="Iskoola Pota"/>
+        <a:font script="Mong" typeface="Mongolian Baiti"/>
+        <a:font script="Viet" typeface="Arial"/>
+        <a:font script="Uigh" typeface="Microsoft Uighur"/>
+        <a:font script="Geor" typeface="Sylfaen"/>
+        <a:font script="Armn" typeface="Arial"/>
+        <a:font script="Bugi" typeface="Leelawadee UI"/>
+        <a:font script="Bopo" typeface="Microsoft JhengHei"/>
+        <a:font script="Java" typeface="Javanese Text"/>
+        <a:font script="Lisu" typeface="Segoe UI"/>
+        <a:font script="Mymr" typeface="Myanmar Text"/>
+        <a:font script="Nkoo" typeface="Ebrima"/>
+        <a:font script="Olck" typeface="Nirmala UI"/>
+        <a:font script="Osma" typeface="Ebrima"/>
+        <a:font script="Phag" typeface="Phagspa"/>
+        <a:font script="Syrn" typeface="Estrangelo Edessa"/>
+        <a:font script="Syrj" typeface="Estrangelo Edessa"/>
+        <a:font script="Syre" typeface="Estrangelo Edessa"/>
+        <a:font script="Sora" typeface="Nirmala UI"/>
+        <a:font script="Tale" typeface="Microsoft Tai Le"/>
+        <a:font script="Talu" typeface="Microsoft New Tai Lue"/>
+        <a:font script="Tfng" typeface="Ebrima"/>
       </a:minorFont>
     </a:fontScheme>
     <a:fmtScheme name="Office">

--- a/practice/bai-2-hanh-chinh.pptx
+++ b/practice/bai-2-hanh-chinh.pptx
@@ -7502,351 +7502,62 @@
           </a:p>
         </p:txBody>
       </p:sp>
-      <p:sp>
-        <p:nvSpPr>
-          <p:cNvPr id="9" name="Shape 6"/>
-          <p:cNvSpPr/>
-          <p:nvPr/>
-        </p:nvSpPr>
-        <p:spPr>
-          <a:xfrm>
-            <a:off x="502920" y="1417320"/>
-            <a:ext cx="11201400" cy="1076706"/>
-          </a:xfrm>
-          <a:prstGeom prst="roundRect">
-            <a:avLst>
-              <a:gd name="adj" fmla="val 7643"/>
-            </a:avLst>
-          </a:prstGeom>
-          <a:solidFill>
-            <a:srgbClr val="FDF1EF"/>
-          </a:solidFill>
-          <a:ln w="15875">
-            <a:solidFill>
-              <a:srgbClr val="FBCEC9"/>
-            </a:solidFill>
-            <a:prstDash val="solid"/>
-          </a:ln>
-        </p:spPr>
-        <p:txBody>
-          <a:bodyPr/>
-          <a:p/>
-        </p:txBody>
-      </p:sp>
-      <p:sp>
-        <p:nvSpPr>
-          <p:cNvPr id="10" name="Text 7"/>
-          <p:cNvSpPr/>
-          <p:nvPr/>
-        </p:nvSpPr>
-        <p:spPr>
-          <a:xfrm>
-            <a:off x="722376" y="1472184"/>
-            <a:ext cx="10762488" cy="966978"/>
-          </a:xfrm>
-          <a:prstGeom prst="rect">
-            <a:avLst/>
-          </a:prstGeom>
-          <a:noFill/>
-          <a:ln/>
-        </p:spPr>
-        <p:txBody>
-          <a:bodyPr wrap="square" lIns="0" tIns="0" rIns="0" bIns="0" rtlCol="0" anchor="ctr"/>
-          <a:lstStyle/>
-          <a:p>
-            <a:pPr indent="0" marL="0">
-              <a:buNone/>
-            </a:pPr>
-            <a:r>
-              <a:rPr lang="en-US" sz="1500" b="1" dirty="0">
-                <a:solidFill>
-                  <a:srgbClr val="AC4D33"/>
-                </a:solidFill>
-                <a:latin typeface="Calibri" pitchFamily="34" charset="0"/>
-                <a:ea typeface="Calibri" pitchFamily="34" charset="-122"/>
-                <a:cs typeface="Calibri" pitchFamily="34" charset="-120"/>
-              </a:rPr>
-              <a:t>Biên bản — mở đầu</a:t>
-            </a:r>
-            <a:endParaRPr lang="en-US" sz="1500" dirty="0"/>
-          </a:p>
-          <a:p>
-            <a:pPr indent="0" marL="0">
-              <a:buNone/>
-            </a:pPr>
-            <a:r>
-              <a:rPr lang="en-US" sz="1300" dirty="0">
-                <a:solidFill>
-                  <a:srgbClr val="3A2B28"/>
-                </a:solidFill>
-                <a:latin typeface="Calibri" pitchFamily="34" charset="0"/>
-                <a:ea typeface="Calibri" pitchFamily="34" charset="-122"/>
-                <a:cs typeface="Calibri" pitchFamily="34" charset="-120"/>
-              </a:rPr>
-              <a:t>Thời gian, địa điểm; thành phần tham dự (chủ trì, thư ký, đại biểu, số người có mặt/vắng); nội dung cuộc họp.</a:t>
-            </a:r>
-            <a:endParaRPr lang="en-US" sz="1500" dirty="0"/>
-          </a:p>
-        </p:txBody>
-      </p:sp>
-      <p:sp>
-        <p:nvSpPr>
-          <p:cNvPr id="11" name="Shape 8"/>
-          <p:cNvSpPr/>
-          <p:nvPr/>
-        </p:nvSpPr>
-        <p:spPr>
-          <a:xfrm>
-            <a:off x="502920" y="2658618"/>
-            <a:ext cx="11201400" cy="1076706"/>
-          </a:xfrm>
-          <a:prstGeom prst="roundRect">
-            <a:avLst>
-              <a:gd name="adj" fmla="val 7643"/>
-            </a:avLst>
-          </a:prstGeom>
-          <a:solidFill>
-            <a:srgbClr val="FDF1EF"/>
-          </a:solidFill>
-          <a:ln w="15875">
-            <a:solidFill>
-              <a:srgbClr val="FBCEC9"/>
-            </a:solidFill>
-            <a:prstDash val="solid"/>
-          </a:ln>
-        </p:spPr>
-        <p:txBody>
-          <a:bodyPr/>
-          <a:p/>
-        </p:txBody>
-      </p:sp>
-      <p:sp>
-        <p:nvSpPr>
-          <p:cNvPr id="12" name="Text 9"/>
-          <p:cNvSpPr/>
-          <p:nvPr/>
-        </p:nvSpPr>
-        <p:spPr>
-          <a:xfrm>
-            <a:off x="722376" y="2713482"/>
-            <a:ext cx="10762488" cy="966978"/>
-          </a:xfrm>
-          <a:prstGeom prst="rect">
-            <a:avLst/>
-          </a:prstGeom>
-          <a:noFill/>
-          <a:ln/>
-        </p:spPr>
-        <p:txBody>
-          <a:bodyPr wrap="square" lIns="0" tIns="0" rIns="0" bIns="0" rtlCol="0" anchor="ctr"/>
-          <a:lstStyle/>
-          <a:p>
-            <a:pPr indent="0" marL="0">
-              <a:buNone/>
-            </a:pPr>
-            <a:r>
-              <a:rPr lang="en-US" sz="1500" b="1" dirty="0">
-                <a:solidFill>
-                  <a:srgbClr val="AC4D33"/>
-                </a:solidFill>
-                <a:latin typeface="Calibri" pitchFamily="34" charset="0"/>
-                <a:ea typeface="Calibri" pitchFamily="34" charset="-122"/>
-                <a:cs typeface="Calibri" pitchFamily="34" charset="-120"/>
-              </a:rPr>
-              <a:t>Biên bản — diễn biến và kết thúc</a:t>
-            </a:r>
-            <a:endParaRPr lang="en-US" sz="1500" dirty="0"/>
-          </a:p>
-          <a:p>
-            <a:pPr indent="0" marL="0">
-              <a:buNone/>
-            </a:pPr>
-            <a:r>
-              <a:rPr lang="en-US" sz="1300" dirty="0">
-                <a:solidFill>
-                  <a:srgbClr val="3A2B28"/>
-                </a:solidFill>
-                <a:latin typeface="Calibri" pitchFamily="34" charset="0"/>
-                <a:ea typeface="Calibri" pitchFamily="34" charset="-122"/>
-                <a:cs typeface="Calibri" pitchFamily="34" charset="-120"/>
-              </a:rPr>
-              <a:t>Ghi tuần tự ý kiến từng người (ngắn gọn, trung thực) → kết luận của chủ trì → “Biên bản kết thúc lúc … giờ, đã đọc lại cho mọi người cùng nghe và thống nhất” → chữ ký thư ký và chủ trì.</a:t>
-            </a:r>
-            <a:endParaRPr lang="en-US" sz="1500" dirty="0"/>
-          </a:p>
-        </p:txBody>
-      </p:sp>
-      <p:sp>
-        <p:nvSpPr>
-          <p:cNvPr id="13" name="Shape 10"/>
-          <p:cNvSpPr/>
-          <p:nvPr/>
-        </p:nvSpPr>
-        <p:spPr>
-          <a:xfrm>
-            <a:off x="502920" y="3899916"/>
-            <a:ext cx="11201400" cy="1076706"/>
-          </a:xfrm>
-          <a:prstGeom prst="roundRect">
-            <a:avLst>
-              <a:gd name="adj" fmla="val 7643"/>
-            </a:avLst>
-          </a:prstGeom>
-          <a:solidFill>
-            <a:srgbClr val="FDF1EF"/>
-          </a:solidFill>
-          <a:ln w="15875">
-            <a:solidFill>
-              <a:srgbClr val="FBCEC9"/>
-            </a:solidFill>
-            <a:prstDash val="solid"/>
-          </a:ln>
-        </p:spPr>
-        <p:txBody>
-          <a:bodyPr/>
-          <a:p/>
-        </p:txBody>
-      </p:sp>
-      <p:sp>
-        <p:nvSpPr>
-          <p:cNvPr id="14" name="Text 11"/>
-          <p:cNvSpPr/>
-          <p:nvPr/>
-        </p:nvSpPr>
-        <p:spPr>
-          <a:xfrm>
-            <a:off x="722376" y="3954780"/>
-            <a:ext cx="10762488" cy="966978"/>
-          </a:xfrm>
-          <a:prstGeom prst="rect">
-            <a:avLst/>
-          </a:prstGeom>
-          <a:noFill/>
-          <a:ln/>
-        </p:spPr>
-        <p:txBody>
-          <a:bodyPr wrap="square" lIns="0" tIns="0" rIns="0" bIns="0" rtlCol="0" anchor="ctr"/>
-          <a:lstStyle/>
-          <a:p>
-            <a:pPr indent="0" marL="0">
-              <a:buNone/>
-            </a:pPr>
-            <a:r>
-              <a:rPr lang="en-US" sz="1500" b="1" dirty="0">
-                <a:solidFill>
-                  <a:srgbClr val="AC4D33"/>
-                </a:solidFill>
-                <a:latin typeface="Calibri" pitchFamily="34" charset="0"/>
-                <a:ea typeface="Calibri" pitchFamily="34" charset="-122"/>
-                <a:cs typeface="Calibri" pitchFamily="34" charset="-120"/>
-              </a:rPr>
-              <a:t>Báo cáo — bố cục</a:t>
-            </a:r>
-            <a:endParaRPr lang="en-US" sz="1500" dirty="0"/>
-          </a:p>
-          <a:p>
-            <a:pPr indent="0" marL="0">
-              <a:buNone/>
-            </a:pPr>
-            <a:r>
-              <a:rPr lang="en-US" sz="1300" dirty="0">
-                <a:solidFill>
-                  <a:srgbClr val="3A2B28"/>
-                </a:solidFill>
-                <a:latin typeface="Calibri" pitchFamily="34" charset="0"/>
-                <a:ea typeface="Calibri" pitchFamily="34" charset="-122"/>
-                <a:cs typeface="Calibri" pitchFamily="34" charset="-120"/>
-              </a:rPr>
-              <a:t>I. Đặc điểm tình hình → II. Kết quả đạt được (có số liệu, so sánh chỉ tiêu) → III. Hạn chế và nguyên nhân → IV. Phương hướng và kiến nghị.</a:t>
-            </a:r>
-            <a:endParaRPr lang="en-US" sz="1500" dirty="0"/>
-          </a:p>
-        </p:txBody>
-      </p:sp>
-      <p:sp>
-        <p:nvSpPr>
-          <p:cNvPr id="15" name="Shape 12"/>
-          <p:cNvSpPr/>
-          <p:nvPr/>
-        </p:nvSpPr>
-        <p:spPr>
-          <a:xfrm>
-            <a:off x="502920" y="5141214"/>
-            <a:ext cx="11201400" cy="1076706"/>
-          </a:xfrm>
-          <a:prstGeom prst="roundRect">
-            <a:avLst>
-              <a:gd name="adj" fmla="val 7643"/>
-            </a:avLst>
-          </a:prstGeom>
-          <a:solidFill>
-            <a:srgbClr val="FDF1EF"/>
-          </a:solidFill>
-          <a:ln w="15875">
-            <a:solidFill>
-              <a:srgbClr val="FBCEC9"/>
-            </a:solidFill>
-            <a:prstDash val="solid"/>
-          </a:ln>
-        </p:spPr>
-        <p:txBody>
-          <a:bodyPr/>
-          <a:p/>
-        </p:txBody>
-      </p:sp>
-      <p:sp>
-        <p:nvSpPr>
-          <p:cNvPr id="16" name="Text 13"/>
-          <p:cNvSpPr/>
-          <p:nvPr/>
-        </p:nvSpPr>
-        <p:spPr>
-          <a:xfrm>
-            <a:off x="722376" y="5196078"/>
-            <a:ext cx="10762488" cy="966978"/>
-          </a:xfrm>
-          <a:prstGeom prst="rect">
-            <a:avLst/>
-          </a:prstGeom>
-          <a:noFill/>
-          <a:ln/>
-        </p:spPr>
-        <p:txBody>
-          <a:bodyPr wrap="square" lIns="0" tIns="0" rIns="0" bIns="0" rtlCol="0" anchor="ctr"/>
-          <a:lstStyle/>
-          <a:p>
-            <a:pPr indent="0" marL="0">
-              <a:buNone/>
-            </a:pPr>
-            <a:r>
-              <a:rPr lang="en-US" sz="1500" b="1" dirty="0">
-                <a:solidFill>
-                  <a:srgbClr val="AC4D33"/>
-                </a:solidFill>
-                <a:latin typeface="Calibri" pitchFamily="34" charset="0"/>
-                <a:ea typeface="Calibri" pitchFamily="34" charset="-122"/>
-                <a:cs typeface="Calibri" pitchFamily="34" charset="-120"/>
-              </a:rPr>
-              <a:t>Lỗi thường gặp</a:t>
-            </a:r>
-            <a:endParaRPr lang="en-US" sz="1500" dirty="0"/>
-          </a:p>
-          <a:p>
-            <a:pPr indent="0" marL="0">
-              <a:buNone/>
-            </a:pPr>
-            <a:r>
-              <a:rPr lang="en-US" sz="1300" dirty="0">
-                <a:solidFill>
-                  <a:srgbClr val="3A2B28"/>
-                </a:solidFill>
-                <a:latin typeface="Calibri" pitchFamily="34" charset="0"/>
-                <a:ea typeface="Calibri" pitchFamily="34" charset="-122"/>
-                <a:cs typeface="Calibri" pitchFamily="34" charset="-120"/>
-              </a:rPr>
-              <a:t>Biên bản ghi thêm nhận xét chủ quan • thiếu chữ ký thư ký • báo cáo chỉ nêu thành tích, né hạn chế • số liệu không nhất quán giữa các phần.</a:t>
-            </a:r>
-            <a:endParaRPr lang="en-US" sz="1500" dirty="0"/>
+      <p:pic>
+        <p:nvPicPr>
+          <p:cNvPr id="9" name="Picture 8" descr="th2-ket-cau-bien-ban-nt.png"/>
+          <p:cNvPicPr>
+            <a:picLocks noChangeAspect="1"/>
+          </p:cNvPicPr>
+          <p:nvPr/>
+        </p:nvPicPr>
+        <p:blipFill>
+          <a:blip r:embed="rId4"/>
+          <a:stretch>
+            <a:fillRect/>
+          </a:stretch>
+        </p:blipFill>
+        <p:spPr>
+          <a:xfrm>
+            <a:off x="831088" y="1689156"/>
+            <a:ext cx="10529518" cy="4293502"/>
+          </a:xfrm>
+          <a:prstGeom prst="rect">
+            <a:avLst/>
+          </a:prstGeom>
+        </p:spPr>
+      </p:pic>
+      <p:sp>
+        <p:nvSpPr>
+          <p:cNvPr id="10" name="TextBox 9"/>
+          <p:cNvSpPr txBox="1"/>
+          <p:nvPr/>
+        </p:nvSpPr>
+        <p:spPr>
+          <a:xfrm>
+            <a:off x="548640" y="6055811"/>
+            <a:ext cx="11109960" cy="310896"/>
+          </a:xfrm>
+          <a:prstGeom prst="rect">
+            <a:avLst/>
+          </a:prstGeom>
+          <a:noFill/>
+        </p:spPr>
+        <p:txBody>
+          <a:bodyPr wrap="square">
+            <a:spAutoFit/>
+          </a:bodyPr>
+          <a:lstStyle/>
+          <a:p>
+            <a:pPr algn="ctr"/>
+            <a:r>
+              <a:rPr sz="1150" i="1">
+                <a:solidFill>
+                  <a:srgbClr val="8A7A76"/>
+                </a:solidFill>
+                <a:latin typeface="Calibri"/>
+              </a:rPr>
+              <a:t>Biên bản ghi tại chỗ và chỉ có giá trị pháp lý khi đủ chữ ký; báo cáo đi theo mạch bốn phần.</a:t>
+            </a:r>
           </a:p>
         </p:txBody>
       </p:sp>

--- a/practice/bai-2-hanh-chinh.pptx
+++ b/practice/bai-2-hanh-chinh.pptx
@@ -1446,10 +1446,28 @@
           <a:lstStyle/>
           <a:p>
             <a:r>
-              <a:rPr lang="en-US" dirty="0"/>
-              <a:t/>
-            </a:r>
-            <a:endParaRPr lang="en-US" dirty="0"/>
+              <a:t>LÀM BÀI (30 phút)</a:t>
+            </a:r>
+          </a:p>
+          <a:p>
+            <a:r>
+              <a:t>• Bốc thăm: chuẩn bị sẵn phiếu, mỗi phiếu ghi 2 loại văn bản.</a:t>
+            </a:r>
+          </a:p>
+          <a:p>
+            <a:r>
+              <a:t>• Nhắc dùng lại bảng kiểm 8 điểm của Bài 1.</a:t>
+            </a:r>
+          </a:p>
+          <a:p>
+            <a:r>
+              <a:t>• Cô đi từng bàn; ưu tiên hỗ trợ bạn bốc trúng quyết định và biên bản (khó nhất).</a:t>
+            </a:r>
+          </a:p>
+          <a:p>
+            <a:r>
+              <a:t>• Cuối buổi: thu bài, nhắc hạn nộp bản chỉnh sửa sau 1 tuần.</a:t>
+            </a:r>
           </a:p>
         </p:txBody>
       </p:sp>

--- a/practice/bai-2-hanh-chinh.pptx
+++ b/practice/bai-2-hanh-chinh.pptx
@@ -2260,7 +2260,7 @@
                 <a:ea typeface="Calibri" pitchFamily="34" charset="-122"/>
                 <a:cs typeface="Calibri" pitchFamily="34" charset="-120"/>
               </a:rPr>
-              <a:t>Je m'appelle Huong  •  GV. Đỗ Thùy Hương  •  EC1103</a:t>
+              <a:t>Je m'appelle Huong  •  GV. Đỗ Thùy Hương  •  EC6000TX</a:t>
             </a:r>
             <a:endParaRPr lang="en-US" sz="900" dirty="0"/>
           </a:p>
@@ -2796,7 +2796,7 @@
                 <a:ea typeface="Calibri" pitchFamily="34" charset="-122"/>
                 <a:cs typeface="Calibri" pitchFamily="34" charset="-120"/>
               </a:rPr>
-              <a:t>Je m'appelle Huong  •  GV. Đỗ Thùy Hương  •  EC1103</a:t>
+              <a:t>Je m'appelle Huong  •  GV. Đỗ Thùy Hương  •  EC6000TX</a:t>
             </a:r>
             <a:endParaRPr lang="en-US" sz="900" dirty="0"/>
           </a:p>
@@ -3332,7 +3332,7 @@
                 <a:ea typeface="Calibri" pitchFamily="34" charset="-122"/>
                 <a:cs typeface="Calibri" pitchFamily="34" charset="-120"/>
               </a:rPr>
-              <a:t>Je m'appelle Huong  •  GV. Đỗ Thùy Hương  •  EC1103</a:t>
+              <a:t>Je m'appelle Huong  •  GV. Đỗ Thùy Hương  •  EC6000TX</a:t>
             </a:r>
             <a:endParaRPr lang="en-US" sz="900" dirty="0"/>
           </a:p>
@@ -4071,7 +4071,7 @@
                 <a:ea typeface="Calibri" pitchFamily="34" charset="-122"/>
                 <a:cs typeface="Calibri" pitchFamily="34" charset="-120"/>
               </a:rPr>
-              <a:t>Je m'appelle Huong  •  GV. Đỗ Thùy Hương  •  EC1103</a:t>
+              <a:t>Je m'appelle Huong  •  GV. Đỗ Thùy Hương  •  EC6000TX</a:t>
             </a:r>
             <a:endParaRPr lang="en-US" sz="900" dirty="0"/>
           </a:p>
@@ -4926,7 +4926,7 @@
                 <a:ea typeface="Calibri" pitchFamily="34" charset="-122"/>
                 <a:cs typeface="Calibri" pitchFamily="34" charset="-120"/>
               </a:rPr>
-              <a:t>Je m'appelle Huong  •  GV. Đỗ Thùy Hương  •  EC1103</a:t>
+              <a:t>Je m'appelle Huong  •  GV. Đỗ Thùy Hương  •  EC6000TX</a:t>
             </a:r>
             <a:endParaRPr lang="en-US" sz="900" dirty="0"/>
           </a:p>
@@ -5736,7 +5736,7 @@
                 <a:ea typeface="Calibri" pitchFamily="34" charset="-122"/>
                 <a:cs typeface="Calibri" pitchFamily="34" charset="-120"/>
               </a:rPr>
-              <a:t>Je m'appelle Huong  •  GV. Đỗ Thùy Hương  •  EC1103</a:t>
+              <a:t>Je m'appelle Huong  •  GV. Đỗ Thùy Hương  •  EC6000TX</a:t>
             </a:r>
             <a:endParaRPr lang="en-US" sz="900" dirty="0"/>
           </a:p>
@@ -6070,7 +6070,7 @@
                 <a:ea typeface="Calibri" pitchFamily="34" charset="-122"/>
                 <a:cs typeface="Calibri" pitchFamily="34" charset="-120"/>
               </a:rPr>
-              <a:t>Je m'appelle Huong  •  GV. Đỗ Thùy Hương  •  EC1103</a:t>
+              <a:t>Je m'appelle Huong  •  GV. Đỗ Thùy Hương  •  EC6000TX</a:t>
             </a:r>
             <a:endParaRPr lang="en-US" sz="900" dirty="0"/>
           </a:p>
@@ -6693,7 +6693,7 @@
                 <a:ea typeface="Calibri" pitchFamily="34" charset="-122"/>
                 <a:cs typeface="Calibri" pitchFamily="34" charset="-120"/>
               </a:rPr>
-              <a:t>Je m'appelle Huong  •  GV. Đỗ Thùy Hương  •  EC1103</a:t>
+              <a:t>Je m'appelle Huong  •  GV. Đỗ Thùy Hương  •  EC6000TX</a:t>
             </a:r>
             <a:endParaRPr lang="en-US" sz="900" dirty="0"/>
           </a:p>
@@ -7316,7 +7316,7 @@
                 <a:ea typeface="Calibri" pitchFamily="34" charset="-122"/>
                 <a:cs typeface="Calibri" pitchFamily="34" charset="-120"/>
               </a:rPr>
-              <a:t>Je m'appelle Huong  •  GV. Đỗ Thùy Hương  •  EC1103</a:t>
+              <a:t>Je m'appelle Huong  •  GV. Đỗ Thùy Hương  •  EC6000TX</a:t>
             </a:r>
             <a:endParaRPr lang="en-US" sz="900" dirty="0"/>
           </a:p>
@@ -7939,7 +7939,7 @@
                 <a:ea typeface="Calibri" pitchFamily="34" charset="-122"/>
                 <a:cs typeface="Calibri" pitchFamily="34" charset="-120"/>
               </a:rPr>
-              <a:t>Je m'appelle Huong  •  GV. Đỗ Thùy Hương  •  EC1103</a:t>
+              <a:t>Je m'appelle Huong  •  GV. Đỗ Thùy Hương  •  EC6000TX</a:t>
             </a:r>
             <a:endParaRPr lang="en-US" sz="900" dirty="0"/>
           </a:p>
